--- a/materials/lectures/15-dijkstra/slides.pptx
+++ b/materials/lectures/15-dijkstra/slides.pptx
@@ -7,7 +7,7 @@
     <p:sldMasterId id="2147483668" r:id="rId3"/>
   </p:sldMasterIdLst>
   <p:notesMasterIdLst>
-    <p:notesMasterId r:id="rId41"/>
+    <p:notesMasterId r:id="rId43"/>
   </p:notesMasterIdLst>
   <p:sldIdLst>
     <p:sldId id="256" r:id="rId4"/>
@@ -30,82 +30,72 @@
     <p:sldId id="875" r:id="rId21"/>
     <p:sldId id="876" r:id="rId22"/>
     <p:sldId id="877" r:id="rId23"/>
-    <p:sldId id="878" r:id="rId24"/>
-    <p:sldId id="879" r:id="rId25"/>
-    <p:sldId id="881" r:id="rId26"/>
-    <p:sldId id="867" r:id="rId27"/>
-    <p:sldId id="882" r:id="rId28"/>
-    <p:sldId id="883" r:id="rId29"/>
-    <p:sldId id="884" r:id="rId30"/>
-    <p:sldId id="885" r:id="rId31"/>
-    <p:sldId id="886" r:id="rId32"/>
-    <p:sldId id="887" r:id="rId33"/>
-    <p:sldId id="889" r:id="rId34"/>
-    <p:sldId id="888" r:id="rId35"/>
-    <p:sldId id="890" r:id="rId36"/>
-    <p:sldId id="891" r:id="rId37"/>
-    <p:sldId id="892" r:id="rId38"/>
-    <p:sldId id="893" r:id="rId39"/>
-    <p:sldId id="880" r:id="rId40"/>
+    <p:sldId id="894" r:id="rId24"/>
+    <p:sldId id="878" r:id="rId25"/>
+    <p:sldId id="879" r:id="rId26"/>
+    <p:sldId id="881" r:id="rId27"/>
+    <p:sldId id="867" r:id="rId28"/>
+    <p:sldId id="882" r:id="rId29"/>
+    <p:sldId id="883" r:id="rId30"/>
+    <p:sldId id="884" r:id="rId31"/>
+    <p:sldId id="885" r:id="rId32"/>
+    <p:sldId id="886" r:id="rId33"/>
+    <p:sldId id="887" r:id="rId34"/>
+    <p:sldId id="889" r:id="rId35"/>
+    <p:sldId id="888" r:id="rId36"/>
+    <p:sldId id="890" r:id="rId37"/>
+    <p:sldId id="891" r:id="rId38"/>
+    <p:sldId id="895" r:id="rId39"/>
+    <p:sldId id="892" r:id="rId40"/>
+    <p:sldId id="893" r:id="rId41"/>
+    <p:sldId id="880" r:id="rId42"/>
   </p:sldIdLst>
   <p:sldSz cx="12192000" cy="6858000"/>
   <p:notesSz cx="6858000" cy="9144000"/>
   <p:embeddedFontLst>
     <p:embeddedFont>
       <p:font typeface="Abadi" panose="020B0604020104020204" pitchFamily="34" charset="0"/>
-      <p:regular r:id="rId42"/>
+      <p:regular r:id="rId44"/>
     </p:embeddedFont>
     <p:embeddedFont>
       <p:font typeface="Arial Nova Cond" panose="020B0506020202020204" pitchFamily="34" charset="0"/>
-      <p:regular r:id="rId43"/>
-      <p:bold r:id="rId44"/>
-      <p:italic r:id="rId45"/>
-      <p:boldItalic r:id="rId46"/>
+      <p:regular r:id="rId45"/>
+      <p:bold r:id="rId46"/>
+      <p:italic r:id="rId47"/>
+      <p:boldItalic r:id="rId48"/>
     </p:embeddedFont>
     <p:embeddedFont>
       <p:font typeface="Bookman Old Style" panose="02050604050505020204" pitchFamily="18" charset="0"/>
-      <p:regular r:id="rId47"/>
-      <p:bold r:id="rId48"/>
-      <p:italic r:id="rId49"/>
-      <p:boldItalic r:id="rId50"/>
-    </p:embeddedFont>
-    <p:embeddedFont>
-      <p:font typeface="Calibri" panose="020F0502020204030204" pitchFamily="34" charset="0"/>
-      <p:regular r:id="rId51"/>
-      <p:bold r:id="rId52"/>
-      <p:italic r:id="rId53"/>
-      <p:boldItalic r:id="rId54"/>
-    </p:embeddedFont>
-    <p:embeddedFont>
-      <p:font typeface="Calibri Light" panose="020F0302020204030204" pitchFamily="34" charset="0"/>
-      <p:regular r:id="rId55"/>
-      <p:italic r:id="rId56"/>
+      <p:regular r:id="rId49"/>
+      <p:bold r:id="rId50"/>
+      <p:italic r:id="rId51"/>
+      <p:boldItalic r:id="rId52"/>
     </p:embeddedFont>
     <p:embeddedFont>
       <p:font typeface="Cambria Math" panose="02040503050406030204" pitchFamily="18" charset="0"/>
-      <p:regular r:id="rId57"/>
+      <p:regular r:id="rId53"/>
     </p:embeddedFont>
     <p:embeddedFont>
       <p:font typeface="Gill Sans MT" panose="020B0502020104020203" pitchFamily="34" charset="0"/>
+      <p:regular r:id="rId54"/>
+      <p:bold r:id="rId55"/>
+      <p:italic r:id="rId56"/>
+      <p:boldItalic r:id="rId57"/>
+    </p:embeddedFont>
+    <p:embeddedFont>
+      <p:font typeface="Times" panose="02020603050405020304" pitchFamily="18" charset="0"/>
       <p:regular r:id="rId58"/>
       <p:bold r:id="rId59"/>
       <p:italic r:id="rId60"/>
       <p:boldItalic r:id="rId61"/>
     </p:embeddedFont>
     <p:embeddedFont>
-      <p:font typeface="Times" panose="02020603050405020304" pitchFamily="18" charset="0"/>
+      <p:font typeface="Wingdings 3" panose="05040102010807070707" pitchFamily="18" charset="2"/>
       <p:regular r:id="rId62"/>
-      <p:bold r:id="rId63"/>
-      <p:italic r:id="rId64"/>
-      <p:boldItalic r:id="rId65"/>
-    </p:embeddedFont>
-    <p:embeddedFont>
-      <p:font typeface="Wingdings 3" panose="05040102010807070707" pitchFamily="18" charset="2"/>
-      <p:regular r:id="rId66"/>
     </p:embeddedFont>
   </p:embeddedFontLst>
   <p:custDataLst>
-    <p:tags r:id="rId67"/>
+    <p:tags r:id="rId63"/>
   </p:custDataLst>
   <p:defaultTextStyle>
     <a:defPPr>
@@ -973,7 +963,7 @@
               <a:pPr>
                 <a:defRPr/>
               </a:pPr>
-              <a:t>5/21/2023</a:t>
+              <a:t>2/22/2025</a:t>
             </a:fld>
             <a:endParaRPr lang="en-US"/>
           </a:p>
@@ -1661,7 +1651,7 @@
               <a:pPr>
                 <a:defRPr/>
               </a:pPr>
-              <a:t>5/21/2023</a:t>
+              <a:t>2/22/2025</a:t>
             </a:fld>
             <a:endParaRPr lang="en-US"/>
           </a:p>
@@ -1905,7 +1895,7 @@
           <a:p>
             <a:fld id="{344494C4-6097-4BA9-B81C-8FE8D10E85BA}" type="datetimeFigureOut">
               <a:rPr lang="en-US" smtClean="0"/>
-              <a:t>5/21/2023</a:t>
+              <a:t>2/22/2025</a:t>
             </a:fld>
             <a:endParaRPr lang="en-US"/>
           </a:p>
@@ -2150,7 +2140,7 @@
           <a:p>
             <a:fld id="{344494C4-6097-4BA9-B81C-8FE8D10E85BA}" type="datetimeFigureOut">
               <a:rPr lang="en-US" smtClean="0"/>
-              <a:t>5/21/2023</a:t>
+              <a:t>2/22/2025</a:t>
             </a:fld>
             <a:endParaRPr lang="en-US"/>
           </a:p>
@@ -2530,7 +2520,7 @@
           <a:p>
             <a:fld id="{344494C4-6097-4BA9-B81C-8FE8D10E85BA}" type="datetimeFigureOut">
               <a:rPr lang="en-US" smtClean="0"/>
-              <a:t>5/21/2023</a:t>
+              <a:t>2/22/2025</a:t>
             </a:fld>
             <a:endParaRPr lang="en-US"/>
           </a:p>
@@ -2663,7 +2653,7 @@
           <a:p>
             <a:fld id="{344494C4-6097-4BA9-B81C-8FE8D10E85BA}" type="datetimeFigureOut">
               <a:rPr lang="en-US" smtClean="0"/>
-              <a:t>5/21/2023</a:t>
+              <a:t>2/22/2025</a:t>
             </a:fld>
             <a:endParaRPr lang="en-US"/>
           </a:p>
@@ -2774,7 +2764,7 @@
           <a:p>
             <a:fld id="{344494C4-6097-4BA9-B81C-8FE8D10E85BA}" type="datetimeFigureOut">
               <a:rPr lang="en-US" smtClean="0"/>
-              <a:t>5/21/2023</a:t>
+              <a:t>2/22/2025</a:t>
             </a:fld>
             <a:endParaRPr lang="en-US"/>
           </a:p>
@@ -3065,7 +3055,7 @@
           <a:p>
             <a:fld id="{344494C4-6097-4BA9-B81C-8FE8D10E85BA}" type="datetimeFigureOut">
               <a:rPr lang="en-US" smtClean="0"/>
-              <a:t>5/21/2023</a:t>
+              <a:t>2/22/2025</a:t>
             </a:fld>
             <a:endParaRPr lang="en-US"/>
           </a:p>
@@ -3333,7 +3323,7 @@
           <a:p>
             <a:fld id="{344494C4-6097-4BA9-B81C-8FE8D10E85BA}" type="datetimeFigureOut">
               <a:rPr lang="en-US" smtClean="0"/>
-              <a:t>5/21/2023</a:t>
+              <a:t>2/22/2025</a:t>
             </a:fld>
             <a:endParaRPr lang="en-US"/>
           </a:p>
@@ -3517,7 +3507,7 @@
           <a:p>
             <a:fld id="{344494C4-6097-4BA9-B81C-8FE8D10E85BA}" type="datetimeFigureOut">
               <a:rPr lang="en-US" smtClean="0"/>
-              <a:t>5/21/2023</a:t>
+              <a:t>2/22/2025</a:t>
             </a:fld>
             <a:endParaRPr lang="en-US"/>
           </a:p>
@@ -3711,7 +3701,7 @@
           <a:p>
             <a:fld id="{344494C4-6097-4BA9-B81C-8FE8D10E85BA}" type="datetimeFigureOut">
               <a:rPr lang="en-US" smtClean="0"/>
-              <a:t>5/21/2023</a:t>
+              <a:t>2/22/2025</a:t>
             </a:fld>
             <a:endParaRPr lang="en-US"/>
           </a:p>
@@ -3909,7 +3899,7 @@
           <a:p>
             <a:fld id="{7BF7D500-1223-4445-9EB2-2C72C770F9EB}" type="datetimeFigureOut">
               <a:rPr lang="en-US" smtClean="0"/>
-              <a:t>5/21/2023</a:t>
+              <a:t>2/22/2025</a:t>
             </a:fld>
             <a:endParaRPr lang="en-US"/>
           </a:p>
@@ -4092,7 +4082,7 @@
               <a:pPr>
                 <a:defRPr/>
               </a:pPr>
-              <a:t>5/21/2023</a:t>
+              <a:t>2/22/2025</a:t>
             </a:fld>
             <a:endParaRPr lang="en-US"/>
           </a:p>
@@ -4246,7 +4236,7 @@
           <a:p>
             <a:fld id="{7BF7D500-1223-4445-9EB2-2C72C770F9EB}" type="datetimeFigureOut">
               <a:rPr lang="en-US" smtClean="0"/>
-              <a:t>5/21/2023</a:t>
+              <a:t>2/22/2025</a:t>
             </a:fld>
             <a:endParaRPr lang="en-US"/>
           </a:p>
@@ -4491,7 +4481,7 @@
           <a:p>
             <a:fld id="{7BF7D500-1223-4445-9EB2-2C72C770F9EB}" type="datetimeFigureOut">
               <a:rPr lang="en-US" smtClean="0"/>
-              <a:t>5/21/2023</a:t>
+              <a:t>2/22/2025</a:t>
             </a:fld>
             <a:endParaRPr lang="en-US"/>
           </a:p>
@@ -4720,7 +4710,7 @@
           <a:p>
             <a:fld id="{7BF7D500-1223-4445-9EB2-2C72C770F9EB}" type="datetimeFigureOut">
               <a:rPr lang="en-US" smtClean="0"/>
-              <a:t>5/21/2023</a:t>
+              <a:t>2/22/2025</a:t>
             </a:fld>
             <a:endParaRPr lang="en-US"/>
           </a:p>
@@ -5084,7 +5074,7 @@
           <a:p>
             <a:fld id="{7BF7D500-1223-4445-9EB2-2C72C770F9EB}" type="datetimeFigureOut">
               <a:rPr lang="en-US" smtClean="0"/>
-              <a:t>5/21/2023</a:t>
+              <a:t>2/22/2025</a:t>
             </a:fld>
             <a:endParaRPr lang="en-US"/>
           </a:p>
@@ -5201,7 +5191,7 @@
           <a:p>
             <a:fld id="{7BF7D500-1223-4445-9EB2-2C72C770F9EB}" type="datetimeFigureOut">
               <a:rPr lang="en-US" smtClean="0"/>
-              <a:t>5/21/2023</a:t>
+              <a:t>2/22/2025</a:t>
             </a:fld>
             <a:endParaRPr lang="en-US"/>
           </a:p>
@@ -5296,7 +5286,7 @@
           <a:p>
             <a:fld id="{7BF7D500-1223-4445-9EB2-2C72C770F9EB}" type="datetimeFigureOut">
               <a:rPr lang="en-US" smtClean="0"/>
-              <a:t>5/21/2023</a:t>
+              <a:t>2/22/2025</a:t>
             </a:fld>
             <a:endParaRPr lang="en-US"/>
           </a:p>
@@ -5571,7 +5561,7 @@
           <a:p>
             <a:fld id="{7BF7D500-1223-4445-9EB2-2C72C770F9EB}" type="datetimeFigureOut">
               <a:rPr lang="en-US" smtClean="0"/>
-              <a:t>5/21/2023</a:t>
+              <a:t>2/22/2025</a:t>
             </a:fld>
             <a:endParaRPr lang="en-US"/>
           </a:p>
@@ -5823,7 +5813,7 @@
           <a:p>
             <a:fld id="{7BF7D500-1223-4445-9EB2-2C72C770F9EB}" type="datetimeFigureOut">
               <a:rPr lang="en-US" smtClean="0"/>
-              <a:t>5/21/2023</a:t>
+              <a:t>2/22/2025</a:t>
             </a:fld>
             <a:endParaRPr lang="en-US"/>
           </a:p>
@@ -5991,7 +5981,7 @@
           <a:p>
             <a:fld id="{7BF7D500-1223-4445-9EB2-2C72C770F9EB}" type="datetimeFigureOut">
               <a:rPr lang="en-US" smtClean="0"/>
-              <a:t>5/21/2023</a:t>
+              <a:t>2/22/2025</a:t>
             </a:fld>
             <a:endParaRPr lang="en-US"/>
           </a:p>
@@ -6169,7 +6159,7 @@
           <a:p>
             <a:fld id="{7BF7D500-1223-4445-9EB2-2C72C770F9EB}" type="datetimeFigureOut">
               <a:rPr lang="en-US" smtClean="0"/>
-              <a:t>5/21/2023</a:t>
+              <a:t>2/22/2025</a:t>
             </a:fld>
             <a:endParaRPr lang="en-US"/>
           </a:p>
@@ -6413,7 +6403,7 @@
               <a:pPr>
                 <a:defRPr/>
               </a:pPr>
-              <a:t>5/21/2023</a:t>
+              <a:t>2/22/2025</a:t>
             </a:fld>
             <a:endParaRPr lang="en-US"/>
           </a:p>
@@ -6763,7 +6753,7 @@
               <a:pPr>
                 <a:defRPr/>
               </a:pPr>
-              <a:t>5/21/2023</a:t>
+              <a:t>2/22/2025</a:t>
             </a:fld>
             <a:endParaRPr lang="en-US"/>
           </a:p>
@@ -6927,7 +6917,7 @@
               <a:pPr>
                 <a:defRPr/>
               </a:pPr>
-              <a:t>5/21/2023</a:t>
+              <a:t>2/22/2025</a:t>
             </a:fld>
             <a:endParaRPr lang="en-US"/>
           </a:p>
@@ -7018,7 +7008,7 @@
               <a:pPr>
                 <a:defRPr/>
               </a:pPr>
-              <a:t>5/21/2023</a:t>
+              <a:t>2/22/2025</a:t>
             </a:fld>
             <a:endParaRPr lang="en-US"/>
           </a:p>
@@ -7127,7 +7117,7 @@
               <a:pPr>
                 <a:defRPr/>
               </a:pPr>
-              <a:t>5/21/2023</a:t>
+              <a:t>2/22/2025</a:t>
             </a:fld>
             <a:endParaRPr lang="en-US"/>
           </a:p>
@@ -7312,7 +7302,7 @@
           <a:p>
             <a:fld id="{344494C4-6097-4BA9-B81C-8FE8D10E85BA}" type="datetimeFigureOut">
               <a:rPr lang="en-US" smtClean="0"/>
-              <a:t>5/21/2023</a:t>
+              <a:t>2/22/2025</a:t>
             </a:fld>
             <a:endParaRPr lang="en-US"/>
           </a:p>
@@ -7496,7 +7486,7 @@
           <a:p>
             <a:fld id="{344494C4-6097-4BA9-B81C-8FE8D10E85BA}" type="datetimeFigureOut">
               <a:rPr lang="en-US" smtClean="0"/>
-              <a:t>5/21/2023</a:t>
+              <a:t>2/22/2025</a:t>
             </a:fld>
             <a:endParaRPr lang="en-US"/>
           </a:p>
@@ -7745,7 +7735,7 @@
               <a:pPr>
                 <a:defRPr/>
               </a:pPr>
-              <a:t>5/21/2023</a:t>
+              <a:t>2/22/2025</a:t>
             </a:fld>
             <a:endParaRPr lang="en-US"/>
           </a:p>
@@ -8999,7 +8989,7 @@
           <a:p>
             <a:fld id="{7BF7D500-1223-4445-9EB2-2C72C770F9EB}" type="datetimeFigureOut">
               <a:rPr lang="en-US" smtClean="0"/>
-              <a:t>5/21/2023</a:t>
+              <a:t>2/22/2025</a:t>
             </a:fld>
             <a:endParaRPr lang="en-US"/>
           </a:p>
@@ -17797,6 +17787,318 @@
   <p:cSld>
     <p:spTree>
       <p:nvGrpSpPr>
+        <p:cNvPr id="1" name="">
+          <a:extLst>
+            <a:ext uri="{FF2B5EF4-FFF2-40B4-BE49-F238E27FC236}">
+              <a16:creationId xmlns:a16="http://schemas.microsoft.com/office/drawing/2014/main" id="{D691C5D8-1996-B59E-9632-B459624CB1C8}"/>
+            </a:ext>
+          </a:extLst>
+        </p:cNvPr>
+        <p:cNvGrpSpPr/>
+        <p:nvPr/>
+      </p:nvGrpSpPr>
+      <p:grpSpPr>
+        <a:xfrm>
+          <a:off x="0" y="0"/>
+          <a:ext cx="0" cy="0"/>
+          <a:chOff x="0" y="0"/>
+          <a:chExt cx="0" cy="0"/>
+        </a:xfrm>
+      </p:grpSpPr>
+      <p:sp>
+        <p:nvSpPr>
+          <p:cNvPr id="2" name="Title 1">
+            <a:extLst>
+              <a:ext uri="{FF2B5EF4-FFF2-40B4-BE49-F238E27FC236}">
+                <a16:creationId xmlns:a16="http://schemas.microsoft.com/office/drawing/2014/main" id="{6249DB9A-6FEB-3A99-4B09-FA9416200D2B}"/>
+              </a:ext>
+            </a:extLst>
+          </p:cNvPr>
+          <p:cNvSpPr>
+            <a:spLocks noGrp="1"/>
+          </p:cNvSpPr>
+          <p:nvPr>
+            <p:ph type="title"/>
+          </p:nvPr>
+        </p:nvSpPr>
+        <p:spPr/>
+        <p:txBody>
+          <a:bodyPr/>
+          <a:lstStyle/>
+          <a:p>
+            <a:r>
+              <a:rPr lang="en-US" dirty="0"/>
+              <a:t>Illustrations</a:t>
+            </a:r>
+          </a:p>
+        </p:txBody>
+      </p:sp>
+      <mc:AlternateContent xmlns:mc="http://schemas.openxmlformats.org/markup-compatibility/2006">
+        <mc:Choice xmlns:a14="http://schemas.microsoft.com/office/drawing/2010/main" Requires="a14">
+          <p:sp>
+            <p:nvSpPr>
+              <p:cNvPr id="3" name="Content Placeholder 2">
+                <a:extLst>
+                  <a:ext uri="{FF2B5EF4-FFF2-40B4-BE49-F238E27FC236}">
+                    <a16:creationId xmlns:a16="http://schemas.microsoft.com/office/drawing/2014/main" id="{16CA6F14-DA8A-085B-D224-F4870353FEB0}"/>
+                  </a:ext>
+                </a:extLst>
+              </p:cNvPr>
+              <p:cNvSpPr>
+                <a:spLocks noGrp="1"/>
+              </p:cNvSpPr>
+              <p:nvPr>
+                <p:ph sz="quarter" idx="1"/>
+              </p:nvPr>
+            </p:nvSpPr>
+            <p:spPr/>
+            <p:txBody>
+              <a:bodyPr/>
+              <a:lstStyle/>
+              <a:p>
+                <a:r>
+                  <a:rPr lang="en-US" dirty="0"/>
+                  <a:t>Note, our algorithm will choose </a:t>
+                </a:r>
+                <a14:m>
+                  <m:oMath xmlns:m="http://schemas.openxmlformats.org/officeDocument/2006/math">
+                    <m:sSub>
+                      <m:sSubPr>
+                        <m:ctrlPr>
+                          <a:rPr lang="en-US" b="0" i="1" smtClean="0">
+                            <a:latin typeface="Cambria Math" panose="02040503050406030204" pitchFamily="18" charset="0"/>
+                          </a:rPr>
+                        </m:ctrlPr>
+                      </m:sSubPr>
+                      <m:e>
+                        <m:r>
+                          <a:rPr lang="en-US" b="0" i="1" smtClean="0">
+                            <a:latin typeface="Cambria Math" panose="02040503050406030204" pitchFamily="18" charset="0"/>
+                          </a:rPr>
+                          <m:t>𝑢</m:t>
+                        </m:r>
+                      </m:e>
+                      <m:sub>
+                        <m:r>
+                          <a:rPr lang="en-US" b="0" i="1" smtClean="0">
+                            <a:latin typeface="Cambria Math" panose="02040503050406030204" pitchFamily="18" charset="0"/>
+                          </a:rPr>
+                          <m:t>6</m:t>
+                        </m:r>
+                      </m:sub>
+                    </m:sSub>
+                  </m:oMath>
+                </a14:m>
+                <a:r>
+                  <a:rPr lang="en-US" dirty="0"/>
+                  <a:t> in this iteration, and afterwards, </a:t>
+                </a:r>
+                <a14:m>
+                  <m:oMath xmlns:m="http://schemas.openxmlformats.org/officeDocument/2006/math">
+                    <m:r>
+                      <a:rPr lang="en-US" b="0" i="1" smtClean="0">
+                        <a:latin typeface="Cambria Math" panose="02040503050406030204" pitchFamily="18" charset="0"/>
+                      </a:rPr>
+                      <m:t>𝐶</m:t>
+                    </m:r>
+                  </m:oMath>
+                </a14:m>
+                <a:r>
+                  <a:rPr lang="en-US" dirty="0"/>
+                  <a:t> will be updated to </a:t>
+                </a:r>
+                <a14:m>
+                  <m:oMath xmlns:m="http://schemas.openxmlformats.org/officeDocument/2006/math">
+                    <m:r>
+                      <m:rPr>
+                        <m:sty m:val="p"/>
+                      </m:rPr>
+                      <a:rPr lang="en-US" b="0" i="0" smtClean="0">
+                        <a:latin typeface="Cambria Math" panose="02040503050406030204" pitchFamily="18" charset="0"/>
+                      </a:rPr>
+                      <m:t>C</m:t>
+                    </m:r>
+                    <m:r>
+                      <a:rPr lang="en-US" b="0" i="1" smtClean="0">
+                        <a:latin typeface="Cambria Math" panose="02040503050406030204" pitchFamily="18" charset="0"/>
+                      </a:rPr>
+                      <m:t>∪{</m:t>
+                    </m:r>
+                    <m:sSub>
+                      <m:sSubPr>
+                        <m:ctrlPr>
+                          <a:rPr lang="en-US" i="1">
+                            <a:latin typeface="Cambria Math" panose="02040503050406030204" pitchFamily="18" charset="0"/>
+                          </a:rPr>
+                        </m:ctrlPr>
+                      </m:sSubPr>
+                      <m:e>
+                        <m:r>
+                          <a:rPr lang="en-US" i="1">
+                            <a:latin typeface="Cambria Math" panose="02040503050406030204" pitchFamily="18" charset="0"/>
+                          </a:rPr>
+                          <m:t>𝑢</m:t>
+                        </m:r>
+                      </m:e>
+                      <m:sub>
+                        <m:r>
+                          <a:rPr lang="en-US" i="1">
+                            <a:latin typeface="Cambria Math" panose="02040503050406030204" pitchFamily="18" charset="0"/>
+                          </a:rPr>
+                          <m:t>6</m:t>
+                        </m:r>
+                      </m:sub>
+                    </m:sSub>
+                    <m:r>
+                      <a:rPr lang="en-US" b="0" i="1" smtClean="0">
+                        <a:latin typeface="Cambria Math" panose="02040503050406030204" pitchFamily="18" charset="0"/>
+                      </a:rPr>
+                      <m:t>}</m:t>
+                    </m:r>
+                  </m:oMath>
+                </a14:m>
+                <a:r>
+                  <a:rPr lang="en-US" dirty="0"/>
+                  <a:t> </a:t>
+                </a:r>
+              </a:p>
+            </p:txBody>
+          </p:sp>
+        </mc:Choice>
+        <mc:Fallback>
+          <p:sp>
+            <p:nvSpPr>
+              <p:cNvPr id="3" name="Content Placeholder 2">
+                <a:extLst>
+                  <a:ext uri="{FF2B5EF4-FFF2-40B4-BE49-F238E27FC236}">
+                    <a16:creationId xmlns:a16="http://schemas.microsoft.com/office/drawing/2014/main" id="{16CA6F14-DA8A-085B-D224-F4870353FEB0}"/>
+                  </a:ext>
+                </a:extLst>
+              </p:cNvPr>
+              <p:cNvSpPr>
+                <a:spLocks noGrp="1" noRot="1" noChangeAspect="1" noMove="1" noResize="1" noEditPoints="1" noAdjustHandles="1" noChangeArrowheads="1" noChangeShapeType="1" noTextEdit="1"/>
+              </p:cNvSpPr>
+              <p:nvPr>
+                <p:ph sz="quarter" idx="1"/>
+              </p:nvPr>
+            </p:nvSpPr>
+            <p:spPr>
+              <a:blipFill>
+                <a:blip r:embed="rId2"/>
+                <a:stretch>
+                  <a:fillRect l="-500" t="-1111"/>
+                </a:stretch>
+              </a:blipFill>
+            </p:spPr>
+            <p:txBody>
+              <a:bodyPr/>
+              <a:lstStyle/>
+              <a:p>
+                <a:r>
+                  <a:rPr lang="en-US">
+                    <a:noFill/>
+                  </a:rPr>
+                  <a:t> </a:t>
+                </a:r>
+              </a:p>
+            </p:txBody>
+          </p:sp>
+        </mc:Fallback>
+      </mc:AlternateContent>
+      <p:pic>
+        <p:nvPicPr>
+          <p:cNvPr id="5" name="Picture 4">
+            <a:extLst>
+              <a:ext uri="{FF2B5EF4-FFF2-40B4-BE49-F238E27FC236}">
+                <a16:creationId xmlns:a16="http://schemas.microsoft.com/office/drawing/2014/main" id="{419126F9-4CFD-4E88-1AF5-F31FB5C0E346}"/>
+              </a:ext>
+            </a:extLst>
+          </p:cNvPr>
+          <p:cNvPicPr>
+            <a:picLocks noChangeAspect="1"/>
+          </p:cNvPicPr>
+          <p:nvPr/>
+        </p:nvPicPr>
+        <p:blipFill>
+          <a:blip r:embed="rId3"/>
+          <a:stretch>
+            <a:fillRect/>
+          </a:stretch>
+        </p:blipFill>
+        <p:spPr>
+          <a:xfrm>
+            <a:off x="1447800" y="2526900"/>
+            <a:ext cx="4114800" cy="3264300"/>
+          </a:xfrm>
+          <a:prstGeom prst="rect">
+            <a:avLst/>
+          </a:prstGeom>
+        </p:spPr>
+      </p:pic>
+      <p:sp>
+        <p:nvSpPr>
+          <p:cNvPr id="10" name="Arrow: Right 9">
+            <a:extLst>
+              <a:ext uri="{FF2B5EF4-FFF2-40B4-BE49-F238E27FC236}">
+                <a16:creationId xmlns:a16="http://schemas.microsoft.com/office/drawing/2014/main" id="{A17390B0-E639-28C2-7403-476E120AD22E}"/>
+              </a:ext>
+            </a:extLst>
+          </p:cNvPr>
+          <p:cNvSpPr/>
+          <p:nvPr/>
+        </p:nvSpPr>
+        <p:spPr>
+          <a:xfrm>
+            <a:off x="5791201" y="4092714"/>
+            <a:ext cx="409099" cy="371556"/>
+          </a:xfrm>
+          <a:prstGeom prst="rightArrow">
+            <a:avLst/>
+          </a:prstGeom>
+        </p:spPr>
+        <p:style>
+          <a:lnRef idx="2">
+            <a:schemeClr val="accent1">
+              <a:shade val="50000"/>
+            </a:schemeClr>
+          </a:lnRef>
+          <a:fillRef idx="1">
+            <a:schemeClr val="accent1"/>
+          </a:fillRef>
+          <a:effectRef idx="0">
+            <a:schemeClr val="accent1"/>
+          </a:effectRef>
+          <a:fontRef idx="minor">
+            <a:schemeClr val="lt1"/>
+          </a:fontRef>
+        </p:style>
+        <p:txBody>
+          <a:bodyPr rtlCol="0" anchor="ctr"/>
+          <a:lstStyle/>
+          <a:p>
+            <a:pPr algn="ctr"/>
+            <a:endParaRPr lang="en-US"/>
+          </a:p>
+        </p:txBody>
+      </p:sp>
+    </p:spTree>
+    <p:extLst>
+      <p:ext uri="{BB962C8B-B14F-4D97-AF65-F5344CB8AC3E}">
+        <p14:creationId xmlns:p14="http://schemas.microsoft.com/office/powerpoint/2010/main" val="183508775"/>
+      </p:ext>
+    </p:extLst>
+  </p:cSld>
+  <p:clrMapOvr>
+    <a:masterClrMapping/>
+  </p:clrMapOvr>
+</p:sld>
+</file>
+
+<file path=ppt/slides/slide22.xml><?xml version="1.0" encoding="utf-8"?>
+<p:sld xmlns:a="http://schemas.openxmlformats.org/drawingml/2006/main" xmlns:r="http://schemas.openxmlformats.org/officeDocument/2006/relationships" xmlns:p="http://schemas.openxmlformats.org/presentationml/2006/main">
+  <p:cSld>
+    <p:spTree>
+      <p:nvGrpSpPr>
         <p:cNvPr id="1" name=""/>
         <p:cNvGrpSpPr/>
         <p:nvPr/>
@@ -18224,8 +18526,8 @@
 </p:sld>
 </file>
 
-<file path=ppt/slides/slide22.xml><?xml version="1.0" encoding="utf-8"?>
-<p:sld xmlns:a="http://schemas.openxmlformats.org/drawingml/2006/main" xmlns:r="http://schemas.openxmlformats.org/officeDocument/2006/relationships" xmlns:p="http://schemas.openxmlformats.org/presentationml/2006/main">
+<file path=ppt/slides/slide23.xml><?xml version="1.0" encoding="utf-8"?>
+<p:sld xmlns:a="http://schemas.openxmlformats.org/drawingml/2006/main" xmlns:r="http://schemas.openxmlformats.org/officeDocument/2006/relationships" xmlns:p="http://schemas.openxmlformats.org/presentationml/2006/main" show="0">
   <p:cSld>
     <p:spTree>
       <p:nvGrpSpPr>
@@ -18862,7 +19164,7 @@
 </p:sld>
 </file>
 
-<file path=ppt/slides/slide23.xml><?xml version="1.0" encoding="utf-8"?>
+<file path=ppt/slides/slide24.xml><?xml version="1.0" encoding="utf-8"?>
 <p:sld xmlns:a="http://schemas.openxmlformats.org/drawingml/2006/main" xmlns:r="http://schemas.openxmlformats.org/officeDocument/2006/relationships" xmlns:p="http://schemas.openxmlformats.org/presentationml/2006/main">
   <p:cSld>
     <p:spTree>
@@ -19196,7 +19498,7 @@
 </p:sld>
 </file>
 
-<file path=ppt/slides/slide24.xml><?xml version="1.0" encoding="utf-8"?>
+<file path=ppt/slides/slide25.xml><?xml version="1.0" encoding="utf-8"?>
 <p:sld xmlns:a="http://schemas.openxmlformats.org/drawingml/2006/main" xmlns:r="http://schemas.openxmlformats.org/officeDocument/2006/relationships" xmlns:p="http://schemas.openxmlformats.org/presentationml/2006/main">
   <p:cSld>
     <p:spTree>
@@ -19260,7 +19562,7 @@
 </p:sld>
 </file>
 
-<file path=ppt/slides/slide25.xml><?xml version="1.0" encoding="utf-8"?>
+<file path=ppt/slides/slide26.xml><?xml version="1.0" encoding="utf-8"?>
 <p:sld xmlns:a="http://schemas.openxmlformats.org/drawingml/2006/main" xmlns:r="http://schemas.openxmlformats.org/officeDocument/2006/relationships" xmlns:p="http://schemas.openxmlformats.org/presentationml/2006/main">
   <p:cSld>
     <p:spTree>
@@ -19612,7 +19914,7 @@
 </p:sld>
 </file>
 
-<file path=ppt/slides/slide26.xml><?xml version="1.0" encoding="utf-8"?>
+<file path=ppt/slides/slide27.xml><?xml version="1.0" encoding="utf-8"?>
 <p:sld xmlns:a="http://schemas.openxmlformats.org/drawingml/2006/main" xmlns:r="http://schemas.openxmlformats.org/officeDocument/2006/relationships" xmlns:p="http://schemas.openxmlformats.org/presentationml/2006/main">
   <p:cSld>
     <p:spTree>
@@ -19956,7 +20258,7 @@
 </p:sld>
 </file>
 
-<file path=ppt/slides/slide27.xml><?xml version="1.0" encoding="utf-8"?>
+<file path=ppt/slides/slide28.xml><?xml version="1.0" encoding="utf-8"?>
 <p:sld xmlns:a="http://schemas.openxmlformats.org/drawingml/2006/main" xmlns:r="http://schemas.openxmlformats.org/officeDocument/2006/relationships" xmlns:p="http://schemas.openxmlformats.org/presentationml/2006/main">
   <p:cSld>
     <p:spTree>
@@ -20501,7 +20803,7 @@
 </p:sld>
 </file>
 
-<file path=ppt/slides/slide28.xml><?xml version="1.0" encoding="utf-8"?>
+<file path=ppt/slides/slide29.xml><?xml version="1.0" encoding="utf-8"?>
 <p:sld xmlns:a="http://schemas.openxmlformats.org/drawingml/2006/main" xmlns:r="http://schemas.openxmlformats.org/officeDocument/2006/relationships" xmlns:p="http://schemas.openxmlformats.org/presentationml/2006/main">
   <p:cSld>
     <p:spTree>
@@ -20592,7 +20894,262 @@
 </p:sld>
 </file>
 
-<file path=ppt/slides/slide29.xml><?xml version="1.0" encoding="utf-8"?>
+<file path=ppt/slides/slide3.xml><?xml version="1.0" encoding="utf-8"?>
+<p:sld xmlns:a="http://schemas.openxmlformats.org/drawingml/2006/main" xmlns:r="http://schemas.openxmlformats.org/officeDocument/2006/relationships" xmlns:p="http://schemas.openxmlformats.org/presentationml/2006/main">
+  <p:cSld>
+    <p:spTree>
+      <p:nvGrpSpPr>
+        <p:cNvPr id="1" name=""/>
+        <p:cNvGrpSpPr/>
+        <p:nvPr/>
+      </p:nvGrpSpPr>
+      <p:grpSpPr>
+        <a:xfrm>
+          <a:off x="0" y="0"/>
+          <a:ext cx="0" cy="0"/>
+          <a:chOff x="0" y="0"/>
+          <a:chExt cx="0" cy="0"/>
+        </a:xfrm>
+      </p:grpSpPr>
+      <p:sp>
+        <p:nvSpPr>
+          <p:cNvPr id="2" name="Title 1">
+            <a:extLst>
+              <a:ext uri="{FF2B5EF4-FFF2-40B4-BE49-F238E27FC236}">
+                <a16:creationId xmlns:a16="http://schemas.microsoft.com/office/drawing/2014/main" id="{614521F8-BB43-4E5B-932B-7BEAF9BD5F10}"/>
+              </a:ext>
+            </a:extLst>
+          </p:cNvPr>
+          <p:cNvSpPr>
+            <a:spLocks noGrp="1"/>
+          </p:cNvSpPr>
+          <p:nvPr>
+            <p:ph type="title"/>
+          </p:nvPr>
+        </p:nvSpPr>
+        <p:spPr/>
+        <p:txBody>
+          <a:bodyPr/>
+          <a:lstStyle/>
+          <a:p>
+            <a:endParaRPr lang="en-US"/>
+          </a:p>
+        </p:txBody>
+      </p:sp>
+      <p:sp>
+        <p:nvSpPr>
+          <p:cNvPr id="3" name="Content Placeholder 2">
+            <a:extLst>
+              <a:ext uri="{FF2B5EF4-FFF2-40B4-BE49-F238E27FC236}">
+                <a16:creationId xmlns:a16="http://schemas.microsoft.com/office/drawing/2014/main" id="{21A479F6-6029-41AF-B734-0F83B748682F}"/>
+              </a:ext>
+            </a:extLst>
+          </p:cNvPr>
+          <p:cNvSpPr>
+            <a:spLocks noGrp="1"/>
+          </p:cNvSpPr>
+          <p:nvPr>
+            <p:ph sz="quarter" idx="1"/>
+          </p:nvPr>
+        </p:nvSpPr>
+        <p:spPr/>
+        <p:txBody>
+          <a:bodyPr/>
+          <a:lstStyle/>
+          <a:p>
+            <a:endParaRPr lang="en-US"/>
+          </a:p>
+        </p:txBody>
+      </p:sp>
+      <p:sp>
+        <p:nvSpPr>
+          <p:cNvPr id="4" name="Title 1">
+            <a:extLst>
+              <a:ext uri="{FF2B5EF4-FFF2-40B4-BE49-F238E27FC236}">
+                <a16:creationId xmlns:a16="http://schemas.microsoft.com/office/drawing/2014/main" id="{0DE8EE78-5C25-4487-B0A3-5D19D29BE7F1}"/>
+              </a:ext>
+            </a:extLst>
+          </p:cNvPr>
+          <p:cNvSpPr txBox="1">
+            <a:spLocks/>
+          </p:cNvSpPr>
+          <p:nvPr/>
+        </p:nvSpPr>
+        <p:spPr bwMode="auto">
+          <a:xfrm>
+            <a:off x="1905000" y="2590800"/>
+            <a:ext cx="8229600" cy="1295400"/>
+          </a:xfrm>
+          <a:prstGeom prst="rect">
+            <a:avLst/>
+          </a:prstGeom>
+          <a:noFill/>
+          <a:ln w="9525">
+            <a:noFill/>
+            <a:miter lim="800000"/>
+            <a:headEnd/>
+            <a:tailEnd/>
+          </a:ln>
+        </p:spPr>
+        <p:txBody>
+          <a:bodyPr vert="horz" wrap="square" lIns="91440" tIns="45720" rIns="91440" bIns="45720" numCol="1" anchor="b" anchorCtr="0" compatLnSpc="1">
+            <a:prstTxWarp prst="textNoShape">
+              <a:avLst/>
+            </a:prstTxWarp>
+          </a:bodyPr>
+          <a:lstStyle>
+            <a:lvl1pPr algn="l" rtl="0" eaLnBrk="0" fontAlgn="base" hangingPunct="0">
+              <a:spcBef>
+                <a:spcPct val="0"/>
+              </a:spcBef>
+              <a:spcAft>
+                <a:spcPct val="0"/>
+              </a:spcAft>
+              <a:defRPr sz="3200" kern="1200">
+                <a:solidFill>
+                  <a:schemeClr val="tx2"/>
+                </a:solidFill>
+                <a:latin typeface="+mj-lt"/>
+                <a:ea typeface="+mj-ea"/>
+                <a:cs typeface="+mj-cs"/>
+              </a:defRPr>
+            </a:lvl1pPr>
+            <a:lvl2pPr algn="l" rtl="0" eaLnBrk="0" fontAlgn="base" hangingPunct="0">
+              <a:spcBef>
+                <a:spcPct val="0"/>
+              </a:spcBef>
+              <a:spcAft>
+                <a:spcPct val="0"/>
+              </a:spcAft>
+              <a:defRPr sz="3200">
+                <a:solidFill>
+                  <a:schemeClr val="tx2"/>
+                </a:solidFill>
+                <a:latin typeface="Bookman Old Style" pitchFamily="18" charset="0"/>
+              </a:defRPr>
+            </a:lvl2pPr>
+            <a:lvl3pPr algn="l" rtl="0" eaLnBrk="0" fontAlgn="base" hangingPunct="0">
+              <a:spcBef>
+                <a:spcPct val="0"/>
+              </a:spcBef>
+              <a:spcAft>
+                <a:spcPct val="0"/>
+              </a:spcAft>
+              <a:defRPr sz="3200">
+                <a:solidFill>
+                  <a:schemeClr val="tx2"/>
+                </a:solidFill>
+                <a:latin typeface="Bookman Old Style" pitchFamily="18" charset="0"/>
+              </a:defRPr>
+            </a:lvl3pPr>
+            <a:lvl4pPr algn="l" rtl="0" eaLnBrk="0" fontAlgn="base" hangingPunct="0">
+              <a:spcBef>
+                <a:spcPct val="0"/>
+              </a:spcBef>
+              <a:spcAft>
+                <a:spcPct val="0"/>
+              </a:spcAft>
+              <a:defRPr sz="3200">
+                <a:solidFill>
+                  <a:schemeClr val="tx2"/>
+                </a:solidFill>
+                <a:latin typeface="Bookman Old Style" pitchFamily="18" charset="0"/>
+              </a:defRPr>
+            </a:lvl4pPr>
+            <a:lvl5pPr algn="l" rtl="0" eaLnBrk="0" fontAlgn="base" hangingPunct="0">
+              <a:spcBef>
+                <a:spcPct val="0"/>
+              </a:spcBef>
+              <a:spcAft>
+                <a:spcPct val="0"/>
+              </a:spcAft>
+              <a:defRPr sz="3200">
+                <a:solidFill>
+                  <a:schemeClr val="tx2"/>
+                </a:solidFill>
+                <a:latin typeface="Bookman Old Style" pitchFamily="18" charset="0"/>
+              </a:defRPr>
+            </a:lvl5pPr>
+            <a:lvl6pPr marL="457200" algn="l" rtl="0" fontAlgn="base">
+              <a:spcBef>
+                <a:spcPct val="0"/>
+              </a:spcBef>
+              <a:spcAft>
+                <a:spcPct val="0"/>
+              </a:spcAft>
+              <a:defRPr sz="3200">
+                <a:solidFill>
+                  <a:schemeClr val="tx2"/>
+                </a:solidFill>
+                <a:latin typeface="Bookman Old Style" pitchFamily="18" charset="0"/>
+              </a:defRPr>
+            </a:lvl6pPr>
+            <a:lvl7pPr marL="914400" algn="l" rtl="0" fontAlgn="base">
+              <a:spcBef>
+                <a:spcPct val="0"/>
+              </a:spcBef>
+              <a:spcAft>
+                <a:spcPct val="0"/>
+              </a:spcAft>
+              <a:defRPr sz="3200">
+                <a:solidFill>
+                  <a:schemeClr val="tx2"/>
+                </a:solidFill>
+                <a:latin typeface="Bookman Old Style" pitchFamily="18" charset="0"/>
+              </a:defRPr>
+            </a:lvl7pPr>
+            <a:lvl8pPr marL="1371600" algn="l" rtl="0" fontAlgn="base">
+              <a:spcBef>
+                <a:spcPct val="0"/>
+              </a:spcBef>
+              <a:spcAft>
+                <a:spcPct val="0"/>
+              </a:spcAft>
+              <a:defRPr sz="3200">
+                <a:solidFill>
+                  <a:schemeClr val="tx2"/>
+                </a:solidFill>
+                <a:latin typeface="Bookman Old Style" pitchFamily="18" charset="0"/>
+              </a:defRPr>
+            </a:lvl8pPr>
+            <a:lvl9pPr marL="1828800" algn="l" rtl="0" fontAlgn="base">
+              <a:spcBef>
+                <a:spcPct val="0"/>
+              </a:spcBef>
+              <a:spcAft>
+                <a:spcPct val="0"/>
+              </a:spcAft>
+              <a:defRPr sz="3200">
+                <a:solidFill>
+                  <a:schemeClr val="tx2"/>
+                </a:solidFill>
+                <a:latin typeface="Bookman Old Style" pitchFamily="18" charset="0"/>
+              </a:defRPr>
+            </a:lvl9pPr>
+          </a:lstStyle>
+          <a:p>
+            <a:pPr algn="ctr"/>
+            <a:r>
+              <a:rPr lang="en-US" dirty="0"/>
+              <a:t>Dijkstra shortest path algorithm</a:t>
+            </a:r>
+          </a:p>
+        </p:txBody>
+      </p:sp>
+    </p:spTree>
+    <p:extLst>
+      <p:ext uri="{BB962C8B-B14F-4D97-AF65-F5344CB8AC3E}">
+        <p14:creationId xmlns:p14="http://schemas.microsoft.com/office/powerpoint/2010/main" val="3135758860"/>
+      </p:ext>
+    </p:extLst>
+  </p:cSld>
+  <p:clrMapOvr>
+    <a:masterClrMapping/>
+  </p:clrMapOvr>
+</p:sld>
+</file>
+
+<file path=ppt/slides/slide30.xml><?xml version="1.0" encoding="utf-8"?>
 <p:sld xmlns:a="http://schemas.openxmlformats.org/drawingml/2006/main" xmlns:r="http://schemas.openxmlformats.org/officeDocument/2006/relationships" xmlns:p="http://schemas.openxmlformats.org/presentationml/2006/main">
   <p:cSld>
     <p:spTree>
@@ -21022,262 +21579,7 @@
 </p:sld>
 </file>
 
-<file path=ppt/slides/slide3.xml><?xml version="1.0" encoding="utf-8"?>
-<p:sld xmlns:a="http://schemas.openxmlformats.org/drawingml/2006/main" xmlns:r="http://schemas.openxmlformats.org/officeDocument/2006/relationships" xmlns:p="http://schemas.openxmlformats.org/presentationml/2006/main">
-  <p:cSld>
-    <p:spTree>
-      <p:nvGrpSpPr>
-        <p:cNvPr id="1" name=""/>
-        <p:cNvGrpSpPr/>
-        <p:nvPr/>
-      </p:nvGrpSpPr>
-      <p:grpSpPr>
-        <a:xfrm>
-          <a:off x="0" y="0"/>
-          <a:ext cx="0" cy="0"/>
-          <a:chOff x="0" y="0"/>
-          <a:chExt cx="0" cy="0"/>
-        </a:xfrm>
-      </p:grpSpPr>
-      <p:sp>
-        <p:nvSpPr>
-          <p:cNvPr id="2" name="Title 1">
-            <a:extLst>
-              <a:ext uri="{FF2B5EF4-FFF2-40B4-BE49-F238E27FC236}">
-                <a16:creationId xmlns:a16="http://schemas.microsoft.com/office/drawing/2014/main" id="{614521F8-BB43-4E5B-932B-7BEAF9BD5F10}"/>
-              </a:ext>
-            </a:extLst>
-          </p:cNvPr>
-          <p:cNvSpPr>
-            <a:spLocks noGrp="1"/>
-          </p:cNvSpPr>
-          <p:nvPr>
-            <p:ph type="title"/>
-          </p:nvPr>
-        </p:nvSpPr>
-        <p:spPr/>
-        <p:txBody>
-          <a:bodyPr/>
-          <a:lstStyle/>
-          <a:p>
-            <a:endParaRPr lang="en-US"/>
-          </a:p>
-        </p:txBody>
-      </p:sp>
-      <p:sp>
-        <p:nvSpPr>
-          <p:cNvPr id="3" name="Content Placeholder 2">
-            <a:extLst>
-              <a:ext uri="{FF2B5EF4-FFF2-40B4-BE49-F238E27FC236}">
-                <a16:creationId xmlns:a16="http://schemas.microsoft.com/office/drawing/2014/main" id="{21A479F6-6029-41AF-B734-0F83B748682F}"/>
-              </a:ext>
-            </a:extLst>
-          </p:cNvPr>
-          <p:cNvSpPr>
-            <a:spLocks noGrp="1"/>
-          </p:cNvSpPr>
-          <p:nvPr>
-            <p:ph sz="quarter" idx="1"/>
-          </p:nvPr>
-        </p:nvSpPr>
-        <p:spPr/>
-        <p:txBody>
-          <a:bodyPr/>
-          <a:lstStyle/>
-          <a:p>
-            <a:endParaRPr lang="en-US"/>
-          </a:p>
-        </p:txBody>
-      </p:sp>
-      <p:sp>
-        <p:nvSpPr>
-          <p:cNvPr id="4" name="Title 1">
-            <a:extLst>
-              <a:ext uri="{FF2B5EF4-FFF2-40B4-BE49-F238E27FC236}">
-                <a16:creationId xmlns:a16="http://schemas.microsoft.com/office/drawing/2014/main" id="{0DE8EE78-5C25-4487-B0A3-5D19D29BE7F1}"/>
-              </a:ext>
-            </a:extLst>
-          </p:cNvPr>
-          <p:cNvSpPr txBox="1">
-            <a:spLocks/>
-          </p:cNvSpPr>
-          <p:nvPr/>
-        </p:nvSpPr>
-        <p:spPr bwMode="auto">
-          <a:xfrm>
-            <a:off x="1905000" y="2590800"/>
-            <a:ext cx="8229600" cy="1295400"/>
-          </a:xfrm>
-          <a:prstGeom prst="rect">
-            <a:avLst/>
-          </a:prstGeom>
-          <a:noFill/>
-          <a:ln w="9525">
-            <a:noFill/>
-            <a:miter lim="800000"/>
-            <a:headEnd/>
-            <a:tailEnd/>
-          </a:ln>
-        </p:spPr>
-        <p:txBody>
-          <a:bodyPr vert="horz" wrap="square" lIns="91440" tIns="45720" rIns="91440" bIns="45720" numCol="1" anchor="b" anchorCtr="0" compatLnSpc="1">
-            <a:prstTxWarp prst="textNoShape">
-              <a:avLst/>
-            </a:prstTxWarp>
-          </a:bodyPr>
-          <a:lstStyle>
-            <a:lvl1pPr algn="l" rtl="0" eaLnBrk="0" fontAlgn="base" hangingPunct="0">
-              <a:spcBef>
-                <a:spcPct val="0"/>
-              </a:spcBef>
-              <a:spcAft>
-                <a:spcPct val="0"/>
-              </a:spcAft>
-              <a:defRPr sz="3200" kern="1200">
-                <a:solidFill>
-                  <a:schemeClr val="tx2"/>
-                </a:solidFill>
-                <a:latin typeface="+mj-lt"/>
-                <a:ea typeface="+mj-ea"/>
-                <a:cs typeface="+mj-cs"/>
-              </a:defRPr>
-            </a:lvl1pPr>
-            <a:lvl2pPr algn="l" rtl="0" eaLnBrk="0" fontAlgn="base" hangingPunct="0">
-              <a:spcBef>
-                <a:spcPct val="0"/>
-              </a:spcBef>
-              <a:spcAft>
-                <a:spcPct val="0"/>
-              </a:spcAft>
-              <a:defRPr sz="3200">
-                <a:solidFill>
-                  <a:schemeClr val="tx2"/>
-                </a:solidFill>
-                <a:latin typeface="Bookman Old Style" pitchFamily="18" charset="0"/>
-              </a:defRPr>
-            </a:lvl2pPr>
-            <a:lvl3pPr algn="l" rtl="0" eaLnBrk="0" fontAlgn="base" hangingPunct="0">
-              <a:spcBef>
-                <a:spcPct val="0"/>
-              </a:spcBef>
-              <a:spcAft>
-                <a:spcPct val="0"/>
-              </a:spcAft>
-              <a:defRPr sz="3200">
-                <a:solidFill>
-                  <a:schemeClr val="tx2"/>
-                </a:solidFill>
-                <a:latin typeface="Bookman Old Style" pitchFamily="18" charset="0"/>
-              </a:defRPr>
-            </a:lvl3pPr>
-            <a:lvl4pPr algn="l" rtl="0" eaLnBrk="0" fontAlgn="base" hangingPunct="0">
-              <a:spcBef>
-                <a:spcPct val="0"/>
-              </a:spcBef>
-              <a:spcAft>
-                <a:spcPct val="0"/>
-              </a:spcAft>
-              <a:defRPr sz="3200">
-                <a:solidFill>
-                  <a:schemeClr val="tx2"/>
-                </a:solidFill>
-                <a:latin typeface="Bookman Old Style" pitchFamily="18" charset="0"/>
-              </a:defRPr>
-            </a:lvl4pPr>
-            <a:lvl5pPr algn="l" rtl="0" eaLnBrk="0" fontAlgn="base" hangingPunct="0">
-              <a:spcBef>
-                <a:spcPct val="0"/>
-              </a:spcBef>
-              <a:spcAft>
-                <a:spcPct val="0"/>
-              </a:spcAft>
-              <a:defRPr sz="3200">
-                <a:solidFill>
-                  <a:schemeClr val="tx2"/>
-                </a:solidFill>
-                <a:latin typeface="Bookman Old Style" pitchFamily="18" charset="0"/>
-              </a:defRPr>
-            </a:lvl5pPr>
-            <a:lvl6pPr marL="457200" algn="l" rtl="0" fontAlgn="base">
-              <a:spcBef>
-                <a:spcPct val="0"/>
-              </a:spcBef>
-              <a:spcAft>
-                <a:spcPct val="0"/>
-              </a:spcAft>
-              <a:defRPr sz="3200">
-                <a:solidFill>
-                  <a:schemeClr val="tx2"/>
-                </a:solidFill>
-                <a:latin typeface="Bookman Old Style" pitchFamily="18" charset="0"/>
-              </a:defRPr>
-            </a:lvl6pPr>
-            <a:lvl7pPr marL="914400" algn="l" rtl="0" fontAlgn="base">
-              <a:spcBef>
-                <a:spcPct val="0"/>
-              </a:spcBef>
-              <a:spcAft>
-                <a:spcPct val="0"/>
-              </a:spcAft>
-              <a:defRPr sz="3200">
-                <a:solidFill>
-                  <a:schemeClr val="tx2"/>
-                </a:solidFill>
-                <a:latin typeface="Bookman Old Style" pitchFamily="18" charset="0"/>
-              </a:defRPr>
-            </a:lvl7pPr>
-            <a:lvl8pPr marL="1371600" algn="l" rtl="0" fontAlgn="base">
-              <a:spcBef>
-                <a:spcPct val="0"/>
-              </a:spcBef>
-              <a:spcAft>
-                <a:spcPct val="0"/>
-              </a:spcAft>
-              <a:defRPr sz="3200">
-                <a:solidFill>
-                  <a:schemeClr val="tx2"/>
-                </a:solidFill>
-                <a:latin typeface="Bookman Old Style" pitchFamily="18" charset="0"/>
-              </a:defRPr>
-            </a:lvl8pPr>
-            <a:lvl9pPr marL="1828800" algn="l" rtl="0" fontAlgn="base">
-              <a:spcBef>
-                <a:spcPct val="0"/>
-              </a:spcBef>
-              <a:spcAft>
-                <a:spcPct val="0"/>
-              </a:spcAft>
-              <a:defRPr sz="3200">
-                <a:solidFill>
-                  <a:schemeClr val="tx2"/>
-                </a:solidFill>
-                <a:latin typeface="Bookman Old Style" pitchFamily="18" charset="0"/>
-              </a:defRPr>
-            </a:lvl9pPr>
-          </a:lstStyle>
-          <a:p>
-            <a:pPr algn="ctr"/>
-            <a:r>
-              <a:rPr lang="en-US" dirty="0"/>
-              <a:t>Dijkstra shortest path algorithm</a:t>
-            </a:r>
-          </a:p>
-        </p:txBody>
-      </p:sp>
-    </p:spTree>
-    <p:extLst>
-      <p:ext uri="{BB962C8B-B14F-4D97-AF65-F5344CB8AC3E}">
-        <p14:creationId xmlns:p14="http://schemas.microsoft.com/office/powerpoint/2010/main" val="3135758860"/>
-      </p:ext>
-    </p:extLst>
-  </p:cSld>
-  <p:clrMapOvr>
-    <a:masterClrMapping/>
-  </p:clrMapOvr>
-</p:sld>
-</file>
-
-<file path=ppt/slides/slide30.xml><?xml version="1.0" encoding="utf-8"?>
+<file path=ppt/slides/slide31.xml><?xml version="1.0" encoding="utf-8"?>
 <p:sld xmlns:a="http://schemas.openxmlformats.org/drawingml/2006/main" xmlns:r="http://schemas.openxmlformats.org/officeDocument/2006/relationships" xmlns:p="http://schemas.openxmlformats.org/presentationml/2006/main">
   <p:cSld>
     <p:spTree>
@@ -21664,7 +21966,7 @@
 </p:sld>
 </file>
 
-<file path=ppt/slides/slide31.xml><?xml version="1.0" encoding="utf-8"?>
+<file path=ppt/slides/slide32.xml><?xml version="1.0" encoding="utf-8"?>
 <p:sld xmlns:a="http://schemas.openxmlformats.org/drawingml/2006/main" xmlns:r="http://schemas.openxmlformats.org/officeDocument/2006/relationships" xmlns:p="http://schemas.openxmlformats.org/presentationml/2006/main">
   <p:cSld>
     <p:spTree>
@@ -22187,7 +22489,7 @@
 </p:sld>
 </file>
 
-<file path=ppt/slides/slide32.xml><?xml version="1.0" encoding="utf-8"?>
+<file path=ppt/slides/slide33.xml><?xml version="1.0" encoding="utf-8"?>
 <p:sld xmlns:a="http://schemas.openxmlformats.org/drawingml/2006/main" xmlns:r="http://schemas.openxmlformats.org/officeDocument/2006/relationships" xmlns:p="http://schemas.openxmlformats.org/presentationml/2006/main">
   <p:cSld>
     <p:spTree>
@@ -22682,7 +22984,7 @@
 </p:sld>
 </file>
 
-<file path=ppt/slides/slide33.xml><?xml version="1.0" encoding="utf-8"?>
+<file path=ppt/slides/slide34.xml><?xml version="1.0" encoding="utf-8"?>
 <p:sld xmlns:a="http://schemas.openxmlformats.org/drawingml/2006/main" xmlns:r="http://schemas.openxmlformats.org/officeDocument/2006/relationships" xmlns:p="http://schemas.openxmlformats.org/presentationml/2006/main">
   <p:cSld>
     <p:spTree>
@@ -23099,7 +23401,7 @@
 </p:sld>
 </file>
 
-<file path=ppt/slides/slide34.xml><?xml version="1.0" encoding="utf-8"?>
+<file path=ppt/slides/slide35.xml><?xml version="1.0" encoding="utf-8"?>
 <p:sld xmlns:a="http://schemas.openxmlformats.org/drawingml/2006/main" xmlns:r="http://schemas.openxmlformats.org/officeDocument/2006/relationships" xmlns:p="http://schemas.openxmlformats.org/presentationml/2006/main">
   <p:cSld>
     <p:spTree>
@@ -23144,14 +23446,192 @@
           </a:p>
         </p:txBody>
       </p:sp>
-      <mc:AlternateContent xmlns:mc="http://schemas.openxmlformats.org/markup-compatibility/2006" xmlns:a14="http://schemas.microsoft.com/office/drawing/2010/main">
-        <mc:Choice Requires="a14">
+      <p:sp>
+        <p:nvSpPr>
+          <p:cNvPr id="3" name="Content Placeholder 2">
+            <a:extLst>
+              <a:ext uri="{FF2B5EF4-FFF2-40B4-BE49-F238E27FC236}">
+                <a16:creationId xmlns:a16="http://schemas.microsoft.com/office/drawing/2014/main" id="{2F4A02B0-13F8-4729-B5AA-1813A1F8EFFC}"/>
+              </a:ext>
+            </a:extLst>
+          </p:cNvPr>
+          <p:cNvSpPr>
+            <a:spLocks noGrp="1"/>
+          </p:cNvSpPr>
+          <p:nvPr>
+            <p:ph sz="quarter" idx="1"/>
+          </p:nvPr>
+        </p:nvSpPr>
+        <p:spPr/>
+        <p:txBody>
+          <a:bodyPr/>
+          <a:lstStyle/>
+          <a:p>
+            <a:r>
+              <a:rPr lang="en-US" sz="2400" dirty="0"/>
+              <a:t>Creating priority queue:  </a:t>
+            </a:r>
+          </a:p>
+          <a:p>
+            <a:pPr lvl="1"/>
+            <a:endParaRPr lang="en-US" sz="2000" dirty="0"/>
+          </a:p>
+          <a:p>
+            <a:r>
+              <a:rPr lang="en-US" sz="2400" dirty="0"/>
+              <a:t>Number of .</a:t>
+            </a:r>
+            <a:r>
+              <a:rPr lang="en-US" sz="2400" dirty="0" err="1"/>
+              <a:t>extract_min</a:t>
+            </a:r>
+            <a:r>
+              <a:rPr lang="en-US" sz="2400" dirty="0"/>
+              <a:t>() </a:t>
+            </a:r>
+          </a:p>
+          <a:p>
+            <a:pPr lvl="1"/>
+            <a:endParaRPr lang="en-US" sz="2000" dirty="0"/>
+          </a:p>
+          <a:p>
+            <a:r>
+              <a:rPr lang="en-US" sz="2400" dirty="0"/>
+              <a:t>Total costs of .</a:t>
+            </a:r>
+            <a:r>
+              <a:rPr lang="en-US" sz="2400" dirty="0" err="1"/>
+              <a:t>extract_min</a:t>
+            </a:r>
+            <a:r>
+              <a:rPr lang="en-US" sz="2400" dirty="0"/>
+              <a:t>() </a:t>
+            </a:r>
+          </a:p>
+          <a:p>
+            <a:pPr lvl="1"/>
+            <a:endParaRPr lang="en-US" sz="2100" dirty="0"/>
+          </a:p>
+          <a:p>
+            <a:r>
+              <a:rPr lang="en-US" sz="2400" dirty="0"/>
+              <a:t>Number of .</a:t>
+            </a:r>
+            <a:r>
+              <a:rPr lang="en-US" sz="2400" dirty="0" err="1"/>
+              <a:t>change_priority</a:t>
+            </a:r>
+            <a:r>
+              <a:rPr lang="en-US" sz="2400" dirty="0"/>
+              <a:t>()</a:t>
+            </a:r>
+          </a:p>
+          <a:p>
+            <a:pPr lvl="1"/>
+            <a:endParaRPr lang="en-US" sz="2100" dirty="0"/>
+          </a:p>
+          <a:p>
+            <a:r>
+              <a:rPr lang="en-US" sz="2400" dirty="0"/>
+              <a:t>Total costs of .</a:t>
+            </a:r>
+            <a:r>
+              <a:rPr lang="en-US" sz="2400" dirty="0" err="1"/>
+              <a:t>change_priority</a:t>
+            </a:r>
+            <a:r>
+              <a:rPr lang="en-US" sz="2400" dirty="0"/>
+              <a:t>()</a:t>
+            </a:r>
+          </a:p>
+          <a:p>
+            <a:pPr lvl="1"/>
+            <a:endParaRPr lang="en-US" sz="2000" dirty="0"/>
+          </a:p>
+          <a:p>
+            <a:r>
+              <a:rPr lang="en-US" sz="2400" dirty="0"/>
+              <a:t>Total time complexity: </a:t>
+            </a:r>
+          </a:p>
+          <a:p>
+            <a:pPr lvl="1"/>
+            <a:endParaRPr lang="en-US" dirty="0"/>
+          </a:p>
+        </p:txBody>
+      </p:sp>
+    </p:spTree>
+    <p:extLst>
+      <p:ext uri="{BB962C8B-B14F-4D97-AF65-F5344CB8AC3E}">
+        <p14:creationId xmlns:p14="http://schemas.microsoft.com/office/powerpoint/2010/main" val="2023295207"/>
+      </p:ext>
+    </p:extLst>
+  </p:cSld>
+  <p:clrMapOvr>
+    <a:masterClrMapping/>
+  </p:clrMapOvr>
+</p:sld>
+</file>
+
+<file path=ppt/slides/slide36.xml><?xml version="1.0" encoding="utf-8"?>
+<p:sld xmlns:a="http://schemas.openxmlformats.org/drawingml/2006/main" xmlns:r="http://schemas.openxmlformats.org/officeDocument/2006/relationships" xmlns:p="http://schemas.openxmlformats.org/presentationml/2006/main">
+  <p:cSld>
+    <p:spTree>
+      <p:nvGrpSpPr>
+        <p:cNvPr id="1" name="">
+          <a:extLst>
+            <a:ext uri="{FF2B5EF4-FFF2-40B4-BE49-F238E27FC236}">
+              <a16:creationId xmlns:a16="http://schemas.microsoft.com/office/drawing/2014/main" id="{F8CDAE3C-A056-9BAC-25AE-6F269547AF02}"/>
+            </a:ext>
+          </a:extLst>
+        </p:cNvPr>
+        <p:cNvGrpSpPr/>
+        <p:nvPr/>
+      </p:nvGrpSpPr>
+      <p:grpSpPr>
+        <a:xfrm>
+          <a:off x="0" y="0"/>
+          <a:ext cx="0" cy="0"/>
+          <a:chOff x="0" y="0"/>
+          <a:chExt cx="0" cy="0"/>
+        </a:xfrm>
+      </p:grpSpPr>
+      <p:sp>
+        <p:nvSpPr>
+          <p:cNvPr id="2" name="Title 1">
+            <a:extLst>
+              <a:ext uri="{FF2B5EF4-FFF2-40B4-BE49-F238E27FC236}">
+                <a16:creationId xmlns:a16="http://schemas.microsoft.com/office/drawing/2014/main" id="{D655714E-0CBE-B355-40F8-B934B1CA64B3}"/>
+              </a:ext>
+            </a:extLst>
+          </p:cNvPr>
+          <p:cNvSpPr>
+            <a:spLocks noGrp="1"/>
+          </p:cNvSpPr>
+          <p:nvPr>
+            <p:ph type="title"/>
+          </p:nvPr>
+        </p:nvSpPr>
+        <p:spPr/>
+        <p:txBody>
+          <a:bodyPr/>
+          <a:lstStyle/>
+          <a:p>
+            <a:r>
+              <a:rPr lang="en-US" sz="2800" dirty="0"/>
+              <a:t>Time Complexity using heap implementation of priority queue</a:t>
+            </a:r>
+          </a:p>
+        </p:txBody>
+      </p:sp>
+      <mc:AlternateContent xmlns:mc="http://schemas.openxmlformats.org/markup-compatibility/2006">
+        <mc:Choice xmlns:a14="http://schemas.microsoft.com/office/drawing/2010/main" Requires="a14">
           <p:sp>
             <p:nvSpPr>
               <p:cNvPr id="3" name="Content Placeholder 2">
                 <a:extLst>
                   <a:ext uri="{FF2B5EF4-FFF2-40B4-BE49-F238E27FC236}">
-                    <a16:creationId xmlns:a16="http://schemas.microsoft.com/office/drawing/2014/main" id="{2F4A02B0-13F8-4729-B5AA-1813A1F8EFFC}"/>
+                    <a16:creationId xmlns:a16="http://schemas.microsoft.com/office/drawing/2014/main" id="{3EBA234B-3CBC-2049-2A7B-57E44E21EEEC}"/>
                   </a:ext>
                 </a:extLst>
               </p:cNvPr>
@@ -23626,13 +24106,13 @@
             </p:txBody>
           </p:sp>
         </mc:Choice>
-        <mc:Fallback xmlns="">
+        <mc:Fallback>
           <p:sp>
             <p:nvSpPr>
               <p:cNvPr id="3" name="Content Placeholder 2">
                 <a:extLst>
                   <a:ext uri="{FF2B5EF4-FFF2-40B4-BE49-F238E27FC236}">
-                    <a16:creationId xmlns:a16="http://schemas.microsoft.com/office/drawing/2014/main" id="{2F4A02B0-13F8-4729-B5AA-1813A1F8EFFC}"/>
+                    <a16:creationId xmlns:a16="http://schemas.microsoft.com/office/drawing/2014/main" id="{3EBA234B-3CBC-2049-2A7B-57E44E21EEEC}"/>
                   </a:ext>
                 </a:extLst>
               </p:cNvPr>
@@ -23647,7 +24127,7 @@
               <a:blipFill>
                 <a:blip r:embed="rId2"/>
                 <a:stretch>
-                  <a:fillRect l="-519" t="-988" r="-444" b="-123"/>
+                  <a:fillRect l="-389" t="-988" b="-123"/>
                 </a:stretch>
               </a:blipFill>
             </p:spPr>
@@ -23669,7 +24149,7 @@
     </p:spTree>
     <p:extLst>
       <p:ext uri="{BB962C8B-B14F-4D97-AF65-F5344CB8AC3E}">
-        <p14:creationId xmlns:p14="http://schemas.microsoft.com/office/powerpoint/2010/main" val="2023295207"/>
+        <p14:creationId xmlns:p14="http://schemas.microsoft.com/office/powerpoint/2010/main" val="1310549834"/>
       </p:ext>
     </p:extLst>
   </p:cSld>
@@ -23679,7 +24159,7 @@
 </p:sld>
 </file>
 
-<file path=ppt/slides/slide35.xml><?xml version="1.0" encoding="utf-8"?>
+<file path=ppt/slides/slide37.xml><?xml version="1.0" encoding="utf-8"?>
 <p:sld xmlns:a="http://schemas.openxmlformats.org/drawingml/2006/main" xmlns:r="http://schemas.openxmlformats.org/officeDocument/2006/relationships" xmlns:p="http://schemas.openxmlformats.org/presentationml/2006/main">
   <p:cSld>
     <p:spTree>
@@ -23887,7 +24367,7 @@
 </p:sld>
 </file>
 
-<file path=ppt/slides/slide36.xml><?xml version="1.0" encoding="utf-8"?>
+<file path=ppt/slides/slide38.xml><?xml version="1.0" encoding="utf-8"?>
 <p:sld xmlns:a="http://schemas.openxmlformats.org/drawingml/2006/main" xmlns:r="http://schemas.openxmlformats.org/officeDocument/2006/relationships" xmlns:p="http://schemas.openxmlformats.org/presentationml/2006/main">
   <p:cSld>
     <p:spTree>
@@ -24296,7 +24776,7 @@
 </p:sld>
 </file>
 
-<file path=ppt/slides/slide37.xml><?xml version="1.0" encoding="utf-8"?>
+<file path=ppt/slides/slide39.xml><?xml version="1.0" encoding="utf-8"?>
 <p:sld xmlns:a="http://schemas.openxmlformats.org/drawingml/2006/main" xmlns:r="http://schemas.openxmlformats.org/officeDocument/2006/relationships" xmlns:p="http://schemas.openxmlformats.org/presentationml/2006/main">
   <p:cSld>
     <p:spTree>
